--- a/sunum.pptx
+++ b/sunum.pptx
@@ -6108,7 +6108,7 @@
                 </a:solidFill>
                 <a:latin typeface="Calibri"/>
               </a:rPr>
-              <a:t>Teşekkürler — Ebubekir Bayar &amp; Furkan Kocataş · github.com/&lt;repo&gt;</a:t>
+              <a:t>Teşekkürler — Ebubekir Bayar &amp; Furkan Kocataş · github.com/FurkanKocatas/medical-triage</a:t>
             </a:r>
           </a:p>
         </p:txBody>
